--- a/ValueCard/SchwartzValueCardGameOnline/OriginalData.pptx
+++ b/ValueCard/SchwartzValueCardGameOnline/OriginalData.pptx
@@ -261,7 +261,7 @@
           <a:p>
             <a:fld id="{F0A092B1-655D-4275-85B4-DE8BFE4915E0}" type="datetimeFigureOut">
               <a:rPr kumimoji="1" lang="ja-JP" altLang="en-US" smtClean="0"/>
-              <a:t>2025/6/11</a:t>
+              <a:t>2026/1/27</a:t>
             </a:fld>
             <a:endParaRPr kumimoji="1" lang="ja-JP" altLang="en-US"/>
           </a:p>
@@ -491,7 +491,7 @@
           <a:p>
             <a:fld id="{F0A092B1-655D-4275-85B4-DE8BFE4915E0}" type="datetimeFigureOut">
               <a:rPr kumimoji="1" lang="ja-JP" altLang="en-US" smtClean="0"/>
-              <a:t>2025/6/11</a:t>
+              <a:t>2026/1/27</a:t>
             </a:fld>
             <a:endParaRPr kumimoji="1" lang="ja-JP" altLang="en-US"/>
           </a:p>
@@ -731,7 +731,7 @@
           <a:p>
             <a:fld id="{F0A092B1-655D-4275-85B4-DE8BFE4915E0}" type="datetimeFigureOut">
               <a:rPr kumimoji="1" lang="ja-JP" altLang="en-US" smtClean="0"/>
-              <a:t>2025/6/11</a:t>
+              <a:t>2026/1/27</a:t>
             </a:fld>
             <a:endParaRPr kumimoji="1" lang="ja-JP" altLang="en-US"/>
           </a:p>
@@ -961,7 +961,7 @@
           <a:p>
             <a:fld id="{F0A092B1-655D-4275-85B4-DE8BFE4915E0}" type="datetimeFigureOut">
               <a:rPr kumimoji="1" lang="ja-JP" altLang="en-US" smtClean="0"/>
-              <a:t>2025/6/11</a:t>
+              <a:t>2026/1/27</a:t>
             </a:fld>
             <a:endParaRPr kumimoji="1" lang="ja-JP" altLang="en-US"/>
           </a:p>
@@ -1236,7 +1236,7 @@
           <a:p>
             <a:fld id="{F0A092B1-655D-4275-85B4-DE8BFE4915E0}" type="datetimeFigureOut">
               <a:rPr kumimoji="1" lang="ja-JP" altLang="en-US" smtClean="0"/>
-              <a:t>2025/6/11</a:t>
+              <a:t>2026/1/27</a:t>
             </a:fld>
             <a:endParaRPr kumimoji="1" lang="ja-JP" altLang="en-US"/>
           </a:p>
@@ -1565,7 +1565,7 @@
           <a:p>
             <a:fld id="{F0A092B1-655D-4275-85B4-DE8BFE4915E0}" type="datetimeFigureOut">
               <a:rPr kumimoji="1" lang="ja-JP" altLang="en-US" smtClean="0"/>
-              <a:t>2025/6/11</a:t>
+              <a:t>2026/1/27</a:t>
             </a:fld>
             <a:endParaRPr kumimoji="1" lang="ja-JP" altLang="en-US"/>
           </a:p>
@@ -2041,7 +2041,7 @@
           <a:p>
             <a:fld id="{F0A092B1-655D-4275-85B4-DE8BFE4915E0}" type="datetimeFigureOut">
               <a:rPr kumimoji="1" lang="ja-JP" altLang="en-US" smtClean="0"/>
-              <a:t>2025/6/11</a:t>
+              <a:t>2026/1/27</a:t>
             </a:fld>
             <a:endParaRPr kumimoji="1" lang="ja-JP" altLang="en-US"/>
           </a:p>
@@ -2182,7 +2182,7 @@
           <a:p>
             <a:fld id="{F0A092B1-655D-4275-85B4-DE8BFE4915E0}" type="datetimeFigureOut">
               <a:rPr kumimoji="1" lang="ja-JP" altLang="en-US" smtClean="0"/>
-              <a:t>2025/6/11</a:t>
+              <a:t>2026/1/27</a:t>
             </a:fld>
             <a:endParaRPr kumimoji="1" lang="ja-JP" altLang="en-US"/>
           </a:p>
@@ -2295,7 +2295,7 @@
           <a:p>
             <a:fld id="{F0A092B1-655D-4275-85B4-DE8BFE4915E0}" type="datetimeFigureOut">
               <a:rPr kumimoji="1" lang="ja-JP" altLang="en-US" smtClean="0"/>
-              <a:t>2025/6/11</a:t>
+              <a:t>2026/1/27</a:t>
             </a:fld>
             <a:endParaRPr kumimoji="1" lang="ja-JP" altLang="en-US"/>
           </a:p>
@@ -2638,7 +2638,7 @@
           <a:p>
             <a:fld id="{F0A092B1-655D-4275-85B4-DE8BFE4915E0}" type="datetimeFigureOut">
               <a:rPr kumimoji="1" lang="ja-JP" altLang="en-US" smtClean="0"/>
-              <a:t>2025/6/11</a:t>
+              <a:t>2026/1/27</a:t>
             </a:fld>
             <a:endParaRPr kumimoji="1" lang="ja-JP" altLang="en-US"/>
           </a:p>
@@ -2926,7 +2926,7 @@
           <a:p>
             <a:fld id="{F0A092B1-655D-4275-85B4-DE8BFE4915E0}" type="datetimeFigureOut">
               <a:rPr kumimoji="1" lang="ja-JP" altLang="en-US" smtClean="0"/>
-              <a:t>2025/6/11</a:t>
+              <a:t>2026/1/27</a:t>
             </a:fld>
             <a:endParaRPr kumimoji="1" lang="ja-JP" altLang="en-US"/>
           </a:p>
@@ -3199,7 +3199,7 @@
           <a:p>
             <a:fld id="{F0A092B1-655D-4275-85B4-DE8BFE4915E0}" type="datetimeFigureOut">
               <a:rPr kumimoji="1" lang="ja-JP" altLang="en-US" smtClean="0"/>
-              <a:t>2025/6/11</a:t>
+              <a:t>2026/1/27</a:t>
             </a:fld>
             <a:endParaRPr kumimoji="1" lang="ja-JP" altLang="en-US"/>
           </a:p>
@@ -4143,7 +4143,7 @@
         </p:nvGrpSpPr>
         <p:grpSpPr>
           <a:xfrm>
-            <a:off x="1739588" y="1205344"/>
+            <a:off x="2466206" y="1205344"/>
             <a:ext cx="1516380" cy="2286000"/>
             <a:chOff x="231421" y="195943"/>
             <a:chExt cx="1516380" cy="2286000"/>
@@ -4268,7 +4268,7 @@
         </p:nvGrpSpPr>
         <p:grpSpPr>
           <a:xfrm>
-            <a:off x="3450278" y="1228204"/>
+            <a:off x="4000366" y="1228204"/>
             <a:ext cx="1516380" cy="2286000"/>
             <a:chOff x="1938301" y="226423"/>
             <a:chExt cx="1516380" cy="2286000"/>
@@ -4383,7 +4383,7 @@
         </p:nvGrpSpPr>
         <p:grpSpPr>
           <a:xfrm>
-            <a:off x="5160968" y="1251064"/>
+            <a:off x="5534526" y="1251064"/>
             <a:ext cx="1516380" cy="2286000"/>
             <a:chOff x="3629941" y="241663"/>
             <a:chExt cx="1516380" cy="2286000"/>
@@ -4528,7 +4528,7 @@
         </p:nvGrpSpPr>
         <p:grpSpPr>
           <a:xfrm>
-            <a:off x="6871658" y="1273924"/>
+            <a:off x="7068686" y="1273924"/>
             <a:ext cx="1516380" cy="2286000"/>
             <a:chOff x="5382541" y="241663"/>
             <a:chExt cx="1516380" cy="2286000"/>
@@ -4703,7 +4703,7 @@
         </p:nvGrpSpPr>
         <p:grpSpPr>
           <a:xfrm>
-            <a:off x="8582348" y="1296784"/>
+            <a:off x="8602846" y="1296784"/>
             <a:ext cx="1516380" cy="2286000"/>
             <a:chOff x="7074181" y="287383"/>
             <a:chExt cx="1516380" cy="2286000"/>
@@ -4869,7 +4869,7 @@
         </p:nvGrpSpPr>
         <p:grpSpPr>
           <a:xfrm>
-            <a:off x="1770068" y="3948544"/>
+            <a:off x="2506668" y="3948544"/>
             <a:ext cx="1516380" cy="2286000"/>
             <a:chOff x="261901" y="2939143"/>
             <a:chExt cx="1516380" cy="2286000"/>
@@ -5002,7 +5002,7 @@
         </p:nvGrpSpPr>
         <p:grpSpPr>
           <a:xfrm>
-            <a:off x="3522668" y="3950434"/>
+            <a:off x="4040828" y="3950434"/>
             <a:ext cx="1516380" cy="2286000"/>
             <a:chOff x="2014501" y="2984863"/>
             <a:chExt cx="1516380" cy="2286000"/>
@@ -5124,7 +5124,7 @@
         </p:nvGrpSpPr>
         <p:grpSpPr>
           <a:xfrm>
-            <a:off x="5183828" y="3954214"/>
+            <a:off x="5574988" y="3954214"/>
             <a:ext cx="1516380" cy="2369880"/>
             <a:chOff x="3675661" y="2977570"/>
             <a:chExt cx="1516380" cy="2369880"/>
@@ -5277,7 +5277,7 @@
         </p:nvGrpSpPr>
         <p:grpSpPr>
           <a:xfrm>
-            <a:off x="6951668" y="3952324"/>
+            <a:off x="7109148" y="3952324"/>
             <a:ext cx="1516380" cy="2286000"/>
             <a:chOff x="5443501" y="3015343"/>
             <a:chExt cx="1516380" cy="2286000"/>
@@ -5399,7 +5399,7 @@
         </p:nvGrpSpPr>
         <p:grpSpPr>
           <a:xfrm>
-            <a:off x="8643308" y="4039984"/>
+            <a:off x="8643308" y="3958344"/>
             <a:ext cx="1516380" cy="2286000"/>
             <a:chOff x="7135141" y="3030583"/>
             <a:chExt cx="1516380" cy="2286000"/>
